--- a/slides/pptx/week17.pptx
+++ b/slides/pptx/week17.pptx
@@ -685,7 +685,8 @@
           <a:p>
             <a:r>
               <a:rPr lang="en-US" dirty="0"/>
-              <a:t>Cold-call one student per row for the one-liner (retrieval) — the diagram's own first-half callback per row IS the "add 2-3 callbacks" instruction, made concrete instead of left to memory. Week 16 is on the map but flag it as differently-assessed — quiz2.md doesn't examine it, the W19 demo does. ~10 min.</a:t>
+              <a:t>Cold-call one student per row for the one-liner (retrieval) — the diagram's own first-half callback per row IS the "add 2-3 callbacks" instruction, made concrete instead of left to memory. Week 16 is on the map but flag it as differently-assessed — quiz2.md doesn't examine it, the W19 demo does. ~10 min.
+Diagram: A revision map for weeks 10 to 16, built on three spine properties every control needs: at a boundary, checked server-side per request (week 10's /api/users/3/orders); on by default, the safe path the only path (week 11's safe.rs bounds checks); fail closed, deny and log the reason, never the secret (week 15's port 8090 vs 8091). Then one row per week, each tied back to a first-half week it builds on: 10 API security builds on 6 authorization; 11 memory safety builds on 4 injection, the sink is now the stack; 12 supply chain builds on 2 SDLC, the scanner is now SCA/SBOM/cosign; 13 cloud/container builds on 3 crypto, a baked-in key is not a secret; 14 AI/LLM builds on 5 XSS, model output is untrusted input; 15 DevSecOps builds on 2 tooling, the same scanners now stop the build; 16 capstone builds on 1 threat modeling, the week 1 DFD is deliverable one.</a:t>
             </a:r>
             <a:endParaRPr lang="en-US" dirty="0"/>
           </a:p>
@@ -1500,7 +1501,7 @@
       </p:grpSpPr>
       <p:pic>
         <p:nvPicPr>
-          <p:cNvPr id="2" name="Image 0" descr="/Users/pop7/Library/CloudStorage/OneDrive-MonsterConnectCo.,Ltd/Lecture/KOSEN69 - software-security/slides/pptx/assets/logo-small.png">    </p:cNvPr>
+          <p:cNvPr id="2" name="Image 0" descr="/private/tmp/claude-501/-Users-pop7-Library-CloudStorage-OneDrive-MonsterConnectCo--Ltd-Lecture-KOSEN69---software-security/e6d6556f-17de-403d-a9a0-cf2f846149b4/scratchpad/tree/slides/pptx/assets/logo-small.png">    </p:cNvPr>
           <p:cNvPicPr>
             <a:picLocks noChangeAspect="1"/>
           </p:cNvPicPr>
@@ -1921,7 +1922,7 @@
       </p:sp>
       <p:pic>
         <p:nvPicPr>
-          <p:cNvPr id="8" name="Image 1" descr="/Users/pop7/Library/CloudStorage/OneDrive-MonsterConnectCo.,Ltd/Lecture/KOSEN69 - software-security/slides/pptx/assets/logo-small.png">    </p:cNvPr>
+          <p:cNvPr id="8" name="Image 1" descr="/private/tmp/claude-501/-Users-pop7-Library-CloudStorage-OneDrive-MonsterConnectCo--Ltd-Lecture-KOSEN69---software-security/e6d6556f-17de-403d-a9a0-cf2f846149b4/scratchpad/tree/slides/pptx/assets/logo-small.png">    </p:cNvPr>
           <p:cNvPicPr>
             <a:picLocks noChangeAspect="1"/>
           </p:cNvPicPr>
@@ -2065,50 +2066,33 @@
           </a:p>
         </p:txBody>
       </p:sp>
-      <p:sp>
-        <p:nvSpPr>
-          <p:cNvPr id="5" name="Text 2"/>
-          <p:cNvSpPr/>
-          <p:nvPr/>
-        </p:nvSpPr>
-        <p:spPr>
-          <a:xfrm>
-            <a:off x="548640" y="1325880"/>
-            <a:ext cx="8046720" cy="3246120"/>
-          </a:xfrm>
-          <a:prstGeom prst="rect">
-            <a:avLst/>
-          </a:prstGeom>
-          <a:noFill/>
-          <a:ln/>
-        </p:spPr>
-        <p:txBody>
-          <a:bodyPr wrap="square" lIns="0" tIns="0" rIns="0" bIns="0" rtlCol="0" anchor="t">
-            <a:normAutofit/>
-          </a:bodyPr>
-          <a:lstStyle/>
-          <a:p>
-            <a:pPr indent="0" marL="0">
-              <a:buNone/>
-            </a:pPr>
-            <a:r>
-              <a:rPr lang="en-US" sz="1400" dirty="0">
-                <a:solidFill>
-                  <a:srgbClr val="1F2937"/>
-                </a:solidFill>
-                <a:latin typeface="Calibri" pitchFamily="34" charset="0"/>
-                <a:ea typeface="Calibri" pitchFamily="34" charset="-122"/>
-                <a:cs typeface="Calibri" pitchFamily="34" charset="-120"/>
-              </a:rPr>
-              <a:t>See diagram: A revision map for weeks 10 to 16, built on three spine properties every control needs: at a boundary, checked server-side per request (week 10's /api/users/3/orders); on by default, the safe path the only path (week 11's safe.rs bounds checks); fail closed, deny and log the reason, never the secret (week 15's port 8090 vs 8091). Then one row per week, each tied back to a first-half week it builds on: 10 API security builds on 6 authorization; 11 memory safety builds on 4 injection, the sink is now the stack; 12 supply chain builds on 2 SDLC, the scanner is now SCA/SBOM/cosign; 13 cloud/container builds on 3 crypto, a baked-in key is not a secret; 14 AI/LLM builds on 5 XSS, model output is untrusted input; 15 DevSecOps builds on 2 tooling, the same scanners now stop the build; 16 capstone builds on 1 threat modeling, the week 1 DFD is deliverable one. (web only)</a:t>
-            </a:r>
-            <a:endParaRPr lang="en-US" sz="1400" dirty="0"/>
-          </a:p>
-        </p:txBody>
-      </p:sp>
-      <p:sp>
-        <p:nvSpPr>
-          <p:cNvPr id="6" name="Text 3"/>
+      <p:pic>
+        <p:nvPicPr>
+          <p:cNvPr id="5" name="Image 1" descr="A revision map for weeks 10 to 16, built on three spine properties every control needs: at a boundary, checked server-side per request (week 10's /api/users/3/orders); on by default, the safe path the only path (week 11's safe.rs bounds checks); fail closed, deny and log the reason, never the secret (week 15's port 8090 vs 8091). Then one row per week, each tied back to a first-half week it builds on: 10 API security builds on 6 authorization; 11 memory safety builds on 4 injection, the sink is now the stack; 12 supply chain builds on 2 SDLC, the scanner is now SCA/SBOM/cosign; 13 cloud/container builds on 3 crypto, a baked-in key is not a secret; 14 AI/LLM builds on 5 XSS, model output is untrusted input; 15 DevSecOps builds on 2 tooling, the same scanners now stop the build; 16 capstone builds on 1 threat modeling, the week 1 DFD is deliverable one.">    </p:cNvPr>
+          <p:cNvPicPr>
+            <a:picLocks noChangeAspect="1"/>
+          </p:cNvPicPr>
+          <p:nvPr/>
+        </p:nvPicPr>
+        <p:blipFill>
+          <a:blip r:embed="rId2"/>
+          <a:stretch>
+            <a:fillRect/>
+          </a:stretch>
+        </p:blipFill>
+        <p:spPr>
+          <a:xfrm>
+            <a:off x="2828156" y="1097280"/>
+            <a:ext cx="3487687" cy="3566160"/>
+          </a:xfrm>
+          <a:prstGeom prst="rect">
+            <a:avLst/>
+          </a:prstGeom>
+        </p:spPr>
+      </p:pic>
+      <p:sp>
+        <p:nvSpPr>
+          <p:cNvPr id="6" name="Text 2"/>
           <p:cNvSpPr/>
           <p:nvPr/>
         </p:nvSpPr>
@@ -2147,14 +2131,14 @@
       </p:sp>
       <p:pic>
         <p:nvPicPr>
-          <p:cNvPr id="7" name="Image 1" descr="/Users/pop7/Library/CloudStorage/OneDrive-MonsterConnectCo.,Ltd/Lecture/KOSEN69 - software-security/slides/pptx/assets/logo-small.png">    </p:cNvPr>
+          <p:cNvPr id="7" name="Image 2" descr="/private/tmp/claude-501/-Users-pop7-Library-CloudStorage-OneDrive-MonsterConnectCo--Ltd-Lecture-KOSEN69---software-security/e6d6556f-17de-403d-a9a0-cf2f846149b4/scratchpad/tree/slides/pptx/assets/logo-small.png">    </p:cNvPr>
           <p:cNvPicPr>
             <a:picLocks noChangeAspect="1"/>
           </p:cNvPicPr>
           <p:nvPr/>
         </p:nvPicPr>
         <p:blipFill>
-          <a:blip r:embed="rId2"/>
+          <a:blip r:embed="rId3"/>
           <a:stretch>
             <a:fillRect/>
           </a:stretch>
@@ -2775,7 +2759,7 @@
       </p:sp>
       <p:pic>
         <p:nvPicPr>
-          <p:cNvPr id="8" name="Image 1" descr="/Users/pop7/Library/CloudStorage/OneDrive-MonsterConnectCo.,Ltd/Lecture/KOSEN69 - software-security/slides/pptx/assets/logo-small.png">    </p:cNvPr>
+          <p:cNvPr id="8" name="Image 1" descr="/private/tmp/claude-501/-Users-pop7-Library-CloudStorage-OneDrive-MonsterConnectCo--Ltd-Lecture-KOSEN69---software-security/e6d6556f-17de-403d-a9a0-cf2f846149b4/scratchpad/tree/slides/pptx/assets/logo-small.png">    </p:cNvPr>
           <p:cNvPicPr>
             <a:picLocks noChangeAspect="1"/>
           </p:cNvPicPr>
@@ -3117,7 +3101,7 @@
       </p:sp>
       <p:pic>
         <p:nvPicPr>
-          <p:cNvPr id="9" name="Image 1" descr="/Users/pop7/Library/CloudStorage/OneDrive-MonsterConnectCo.,Ltd/Lecture/KOSEN69 - software-security/slides/pptx/assets/logo-small.png">    </p:cNvPr>
+          <p:cNvPr id="9" name="Image 1" descr="/private/tmp/claude-501/-Users-pop7-Library-CloudStorage-OneDrive-MonsterConnectCo--Ltd-Lecture-KOSEN69---software-security/e6d6556f-17de-403d-a9a0-cf2f846149b4/scratchpad/tree/slides/pptx/assets/logo-small.png">    </p:cNvPr>
           <p:cNvPicPr>
             <a:picLocks noChangeAspect="1"/>
           </p:cNvPicPr>
@@ -3376,7 +3360,7 @@
       </p:sp>
       <p:pic>
         <p:nvPicPr>
-          <p:cNvPr id="8" name="Image 1" descr="/Users/pop7/Library/CloudStorage/OneDrive-MonsterConnectCo.,Ltd/Lecture/KOSEN69 - software-security/slides/pptx/assets/logo-small.png">    </p:cNvPr>
+          <p:cNvPr id="8" name="Image 1" descr="/private/tmp/claude-501/-Users-pop7-Library-CloudStorage-OneDrive-MonsterConnectCo--Ltd-Lecture-KOSEN69---software-security/e6d6556f-17de-403d-a9a0-cf2f846149b4/scratchpad/tree/slides/pptx/assets/logo-small.png">    </p:cNvPr>
           <p:cNvPicPr>
             <a:picLocks noChangeAspect="1"/>
           </p:cNvPicPr>
@@ -3656,7 +3640,7 @@
       </p:sp>
       <p:pic>
         <p:nvPicPr>
-          <p:cNvPr id="8" name="Image 1" descr="/Users/pop7/Library/CloudStorage/OneDrive-MonsterConnectCo.,Ltd/Lecture/KOSEN69 - software-security/slides/pptx/assets/logo-small.png">    </p:cNvPr>
+          <p:cNvPr id="8" name="Image 1" descr="/private/tmp/claude-501/-Users-pop7-Library-CloudStorage-OneDrive-MonsterConnectCo--Ltd-Lecture-KOSEN69---software-security/e6d6556f-17de-403d-a9a0-cf2f846149b4/scratchpad/tree/slides/pptx/assets/logo-small.png">    </p:cNvPr>
           <p:cNvPicPr>
             <a:picLocks noChangeAspect="1"/>
           </p:cNvPicPr>
@@ -3790,7 +3774,7 @@
       </p:sp>
       <p:pic>
         <p:nvPicPr>
-          <p:cNvPr id="4" name="Image 0" descr="/Users/pop7/Library/CloudStorage/OneDrive-MonsterConnectCo.,Ltd/Lecture/KOSEN69 - software-security/slides/pptx/assets/logo-small.png">    </p:cNvPr>
+          <p:cNvPr id="4" name="Image 0" descr="/private/tmp/claude-501/-Users-pop7-Library-CloudStorage-OneDrive-MonsterConnectCo--Ltd-Lecture-KOSEN69---software-security/e6d6556f-17de-403d-a9a0-cf2f846149b4/scratchpad/tree/slides/pptx/assets/logo-small.png">    </p:cNvPr>
           <p:cNvPicPr>
             <a:picLocks noChangeAspect="1"/>
           </p:cNvPicPr>
